--- a/assets/ppts/M1.8_P2P_BitTorrent.pptx
+++ b/assets/ppts/M1.8_P2P_BitTorrent.pptx
@@ -3142,8 +3142,8 @@
         </p:nvSpPr>
         <p:spPr>
           <a:xfrm>
-            <a:off x="822960" y="1188720"/>
-            <a:ext cx="164592" cy="4480560"/>
+            <a:off x="0" y="0"/>
+            <a:ext cx="12191695" cy="137160"/>
           </a:xfrm>
           <a:prstGeom prst="rect">
             <a:avLst/>
@@ -3179,14 +3179,57 @@
       </p:sp>
       <p:sp>
         <p:nvSpPr>
-          <p:cNvPr id="4" name="TextBox 3"/>
+          <p:cNvPr id="4" name="Rectangle 3"/>
+          <p:cNvSpPr/>
+          <p:nvPr/>
+        </p:nvSpPr>
+        <p:spPr>
+          <a:xfrm>
+            <a:off x="822960" y="1097280"/>
+            <a:ext cx="164592" cy="4663440"/>
+          </a:xfrm>
+          <a:prstGeom prst="rect">
+            <a:avLst/>
+          </a:prstGeom>
+          <a:solidFill>
+            <a:srgbClr val="D97706"/>
+          </a:solidFill>
+          <a:ln>
+            <a:noFill/>
+          </a:ln>
+        </p:spPr>
+        <p:style>
+          <a:lnRef idx="1">
+            <a:schemeClr val="accent1"/>
+          </a:lnRef>
+          <a:fillRef idx="3">
+            <a:schemeClr val="accent1"/>
+          </a:fillRef>
+          <a:effectRef idx="2">
+            <a:schemeClr val="accent1"/>
+          </a:effectRef>
+          <a:fontRef idx="minor">
+            <a:schemeClr val="lt1"/>
+          </a:fontRef>
+        </p:style>
+        <p:txBody>
+          <a:bodyPr rtlCol="0" anchor="ctr"/>
+          <a:lstStyle/>
+          <a:p>
+            <a:pPr algn="ctr"/>
+          </a:p>
+        </p:txBody>
+      </p:sp>
+      <p:sp>
+        <p:nvSpPr>
+          <p:cNvPr id="5" name="TextBox 4"/>
           <p:cNvSpPr txBox="1"/>
           <p:nvPr/>
         </p:nvSpPr>
         <p:spPr>
           <a:xfrm>
-            <a:off x="1280160" y="1097280"/>
-            <a:ext cx="10058400" cy="4663440"/>
+            <a:off x="1234440" y="1005840"/>
+            <a:ext cx="10241280" cy="4846320"/>
           </a:xfrm>
           <a:prstGeom prst="rect">
             <a:avLst/>
@@ -3201,70 +3244,165 @@
           <a:p>
             <a:pPr>
               <a:spcAft>
+                <a:spcPts val="1000"/>
+              </a:spcAft>
+              <a:defRPr b="1" sz="1300">
+                <a:solidFill>
+                  <a:srgbClr val="D97706"/>
+                </a:solidFill>
+              </a:defRPr>
+            </a:pPr>
+            <a:r>
+              <a:t>PCCST501 Computer Networks | KTU 2024 Scheme • MODULE 1 • M1.8</a:t>
+            </a:r>
+          </a:p>
+          <a:p>
+            <a:pPr>
+              <a:spcAft>
                 <a:spcPts val="1200"/>
               </a:spcAft>
-              <a:defRPr b="1" sz="1300">
-                <a:solidFill>
-                  <a:srgbClr val="D97706"/>
-                </a:solidFill>
-              </a:defRPr>
-            </a:pPr>
-            <a:r>
-              <a:t>PCCST501 Computer Networks | KTU 2024 Scheme • MODULE 1 • M1.8</a:t>
+              <a:defRPr b="1" sz="3000">
+                <a:solidFill>
+                  <a:srgbClr val="F8FAFC"/>
+                </a:solidFill>
+              </a:defRPr>
+            </a:pPr>
+            <a:r>
+              <a:t>Peer-to-Peer Paradigm &amp; BitTorrent Case Study</a:t>
             </a:r>
           </a:p>
           <a:p>
             <a:pPr>
               <a:spcAft>
-                <a:spcPts val="1400"/>
+                <a:spcPts val="2400"/>
               </a:spcAft>
-              <a:defRPr b="1" sz="3200">
-                <a:solidFill>
-                  <a:srgbClr val="F8FAFC"/>
-                </a:solidFill>
-              </a:defRPr>
-            </a:pPr>
-            <a:r>
-              <a:t>Peer-to-Peer Paradigm &amp; BitTorrent Case Study</a:t>
+              <a:defRPr sz="1600">
+                <a:solidFill>
+                  <a:srgbClr val="94A3B8"/>
+                </a:solidFill>
+              </a:defRPr>
+            </a:pPr>
+            <a:r>
+              <a:t>P2P File Distribution Time ($D_{P2P}$ vs $D_{CS}$), Torrents, Trackers &amp; DHT, Chunks &amp; Pieces, Rarest-First, Tit-for-Tat Choking</a:t>
             </a:r>
           </a:p>
           <a:p>
             <a:pPr>
               <a:spcAft>
-                <a:spcPts val="2800"/>
+                <a:spcPts val="300"/>
               </a:spcAft>
-              <a:defRPr sz="1700">
+              <a:defRPr b="1" sz="1350">
+                <a:solidFill>
+                  <a:srgbClr val="E2E8F0"/>
+                </a:solidFill>
+              </a:defRPr>
+            </a:pPr>
+            <a:r>
+              <a:t>Prepared by: Prof. Anju Markose | Assistant Professor, Dept. of CSE | VJCET</a:t>
+            </a:r>
+          </a:p>
+          <a:p>
+            <a:pPr>
+              <a:defRPr sz="1150">
                 <a:solidFill>
                   <a:srgbClr val="94A3B8"/>
                 </a:solidFill>
               </a:defRPr>
             </a:pPr>
             <a:r>
-              <a:t>P2P Scalability Analysis, BitTorrent Swarming, Trackers, Rarest-First Chunk Selection &amp; Tit-for-Tat Choking</a:t>
-            </a:r>
-          </a:p>
+              <a:t>Viswajyothi College of Engineering and Technology (VJCET), Vazhakulam • KTU S5 CSE</a:t>
+            </a:r>
+          </a:p>
+        </p:txBody>
+      </p:sp>
+      <p:sp>
+        <p:nvSpPr>
+          <p:cNvPr id="6" name="Rounded Rectangle 5"/>
+          <p:cNvSpPr/>
+          <p:nvPr/>
+        </p:nvSpPr>
+        <p:spPr>
+          <a:xfrm>
+            <a:off x="8412480" y="5120640"/>
+            <a:ext cx="3017520" cy="822960"/>
+          </a:xfrm>
+          <a:prstGeom prst="roundRect">
+            <a:avLst/>
+          </a:prstGeom>
+          <a:solidFill>
+            <a:srgbClr val="1E293B"/>
+          </a:solidFill>
+          <a:ln w="12700">
+            <a:solidFill>
+              <a:srgbClr val="0E7490"/>
+            </a:solidFill>
+          </a:ln>
+        </p:spPr>
+        <p:style>
+          <a:lnRef idx="1">
+            <a:schemeClr val="accent1"/>
+          </a:lnRef>
+          <a:fillRef idx="3">
+            <a:schemeClr val="accent1"/>
+          </a:fillRef>
+          <a:effectRef idx="2">
+            <a:schemeClr val="accent1"/>
+          </a:effectRef>
+          <a:fontRef idx="minor">
+            <a:schemeClr val="lt1"/>
+          </a:fontRef>
+        </p:style>
+        <p:txBody>
+          <a:bodyPr rtlCol="0" anchor="ctr"/>
+          <a:lstStyle/>
+          <a:p>
+            <a:pPr algn="ctr"/>
+          </a:p>
+        </p:txBody>
+      </p:sp>
+      <p:sp>
+        <p:nvSpPr>
+          <p:cNvPr id="7" name="TextBox 6"/>
+          <p:cNvSpPr txBox="1"/>
+          <p:nvPr/>
+        </p:nvSpPr>
+        <p:spPr>
+          <a:xfrm>
+            <a:off x="8503920" y="5166360"/>
+            <a:ext cx="2834640" cy="731520"/>
+          </a:xfrm>
+          <a:prstGeom prst="rect">
+            <a:avLst/>
+          </a:prstGeom>
+          <a:noFill/>
+        </p:spPr>
+        <p:txBody>
+          <a:bodyPr wrap="none">
+            <a:spAutoFit/>
+          </a:bodyPr>
+          <a:lstStyle/>
           <a:p>
             <a:pPr>
-              <a:defRPr b="1" sz="1300">
-                <a:solidFill>
-                  <a:srgbClr val="E2E8F0"/>
-                </a:solidFill>
-              </a:defRPr>
-            </a:pPr>
-            <a:r>
-              <a:t>Prepared by: Prof. Anju Markose | Assistant Professor, Dept. of CSE | VJCET</a:t>
+              <a:defRPr b="1" sz="1050">
+                <a:solidFill>
+                  <a:srgbClr val="D97706"/>
+                </a:solidFill>
+              </a:defRPr>
+            </a:pPr>
+            <a:r>
+              <a:t>KTU B.Tech Curriculum</a:t>
             </a:r>
           </a:p>
           <a:p>
             <a:pPr>
-              <a:defRPr sz="1100">
-                <a:solidFill>
-                  <a:srgbClr val="94A3B8"/>
-                </a:solidFill>
-              </a:defRPr>
-            </a:pPr>
-            <a:r>
-              <a:t>Viswajyothi College of Engineering and Technology (VJCET), Vazhakulam</a:t>
+              <a:defRPr sz="950">
+                <a:solidFill>
+                  <a:srgbClr val="F8FAFC"/>
+                </a:solidFill>
+              </a:defRPr>
+            </a:pPr>
+            <a:r>
+              <a:t>Official Classroom Slide Deck</a:t>
             </a:r>
           </a:p>
         </p:txBody>
@@ -3396,14 +3534,14 @@
           <a:lstStyle/>
           <a:p>
             <a:pPr>
-              <a:defRPr b="1" sz="2300">
+              <a:defRPr b="1" sz="2200">
                 <a:solidFill>
                   <a:srgbClr val="F8FAFC"/>
                 </a:solidFill>
               </a:defRPr>
             </a:pPr>
             <a:r>
-              <a:t>1.8.1 P2P vs Client-Server File Distribution Scalability</a:t>
+              <a:t>1.8.1 P2P File Distribution vs Client-Server Scalability</a:t>
             </a:r>
           </a:p>
         </p:txBody>
@@ -3451,7 +3589,7 @@
         </p:nvSpPr>
         <p:spPr>
           <a:xfrm>
-            <a:off x="731520" y="1280160"/>
+            <a:off x="731520" y="1234440"/>
             <a:ext cx="6858000" cy="4937760"/>
           </a:xfrm>
           <a:prstGeom prst="rect">
@@ -3469,7 +3607,7 @@
               <a:spcAft>
                 <a:spcPts val="200"/>
               </a:spcAft>
-              <a:defRPr b="1" sz="1500">
+              <a:defRPr b="1" sz="1450">
                 <a:solidFill>
                   <a:srgbClr val="0F1E4A"/>
                 </a:solidFill>
@@ -3482,16 +3620,16 @@
           <a:p>
             <a:pPr>
               <a:spcAft>
-                <a:spcPts val="800"/>
+                <a:spcPts val="700"/>
               </a:spcAft>
-              <a:defRPr sz="1300">
-                <a:solidFill>
-                  <a:srgbClr val="1E293B"/>
-                </a:solidFill>
-              </a:defRPr>
-            </a:pPr>
-            <a:r>
-              <a:t>   Distribute a large file of size $F$ bits from a single server to $N$ independent peers/clients.</a:t>
+              <a:defRPr sz="1250">
+                <a:solidFill>
+                  <a:srgbClr val="0F172A"/>
+                </a:solidFill>
+              </a:defRPr>
+            </a:pPr>
+            <a:r>
+              <a:t>   A server holds a file of size $F$ bits and needs to distribute copies to $N$ independent peer clients. Server upload rate is $u_s$, peer upload rates $u_i$, peer download rates $d_i$.</a:t>
             </a:r>
           </a:p>
           <a:p>
@@ -3499,29 +3637,29 @@
               <a:spcAft>
                 <a:spcPts val="200"/>
               </a:spcAft>
-              <a:defRPr b="1" sz="1500">
+              <a:defRPr b="1" sz="1450">
                 <a:solidFill>
                   <a:srgbClr val="0F1E4A"/>
                 </a:solidFill>
               </a:defRPr>
             </a:pPr>
             <a:r>
-              <a:t>• Client-Server Distribution Time</a:t>
+              <a:t>• Client-Server Distribution Time ($D_{CS}$)</a:t>
             </a:r>
           </a:p>
           <a:p>
             <a:pPr>
               <a:spcAft>
-                <a:spcPts val="800"/>
+                <a:spcPts val="700"/>
               </a:spcAft>
-              <a:defRPr sz="1300">
-                <a:solidFill>
-                  <a:srgbClr val="1E293B"/>
-                </a:solidFill>
-              </a:defRPr>
-            </a:pPr>
-            <a:r>
-              <a:t>   $D_{C-S} \ge \max \left( \frac{NF}{u_s}, \frac{F}{d_{min}} \right)$. Time increases LINEARLY with $N$. As $N \to \infty$, server upload link becomes the fatal bottleneck.</a:t>
+              <a:defRPr sz="1250">
+                <a:solidFill>
+                  <a:srgbClr val="0F172A"/>
+                </a:solidFill>
+              </a:defRPr>
+            </a:pPr>
+            <a:r>
+              <a:t>   $D_{CS} \ge \max \{ \frac{N \cdot F}{u_s}, \frac{F}{d_{min}} \}$. As $N$ grows, $D_{CS}$ increases linearly with $N$. Adding more clients degrades service.</a:t>
             </a:r>
           </a:p>
           <a:p>
@@ -3529,29 +3667,29 @@
               <a:spcAft>
                 <a:spcPts val="200"/>
               </a:spcAft>
-              <a:defRPr b="1" sz="1500">
+              <a:defRPr b="1" sz="1450">
                 <a:solidFill>
                   <a:srgbClr val="0F1E4A"/>
                 </a:solidFill>
               </a:defRPr>
             </a:pPr>
             <a:r>
-              <a:t>• P2P Distribution Time</a:t>
+              <a:t>• P2P Distribution Time ($D_{P2P}$)</a:t>
             </a:r>
           </a:p>
           <a:p>
             <a:pPr>
               <a:spcAft>
-                <a:spcPts val="800"/>
+                <a:spcPts val="700"/>
               </a:spcAft>
-              <a:defRPr sz="1300">
-                <a:solidFill>
-                  <a:srgbClr val="1E293B"/>
-                </a:solidFill>
-              </a:defRPr>
-            </a:pPr>
-            <a:r>
-              <a:t>   $D_{P2P} \ge \max \left( \frac{F}{u_s}, \frac{F}{d_{min}}, \frac{NF}{u_s + \sum_{i=1}^N u_i} \right)$.</a:t>
+              <a:defRPr sz="1250">
+                <a:solidFill>
+                  <a:srgbClr val="0F172A"/>
+                </a:solidFill>
+              </a:defRPr>
+            </a:pPr>
+            <a:r>
+              <a:t>   $D_{P2P} \ge \max \{ \frac{F}{u_s}, \frac{F}{d_{min}}, \frac{N \cdot F}{u_s + \sum_{i=1}^N u_i} \}$. Each client donates upload capacity ($u_i$) back to the swarm.</a:t>
             </a:r>
           </a:p>
           <a:p>
@@ -3559,29 +3697,29 @@
               <a:spcAft>
                 <a:spcPts val="200"/>
               </a:spcAft>
-              <a:defRPr b="1" sz="1500">
+              <a:defRPr b="1" sz="1450">
                 <a:solidFill>
                   <a:srgbClr val="0F1E4A"/>
                 </a:solidFill>
               </a:defRPr>
             </a:pPr>
             <a:r>
-              <a:t>• Self-Scalability Principle</a:t>
+              <a:t>• Self-Scalability of P2P</a:t>
             </a:r>
           </a:p>
           <a:p>
             <a:pPr>
               <a:spcAft>
-                <a:spcPts val="800"/>
+                <a:spcPts val="700"/>
               </a:spcAft>
-              <a:defRPr sz="1300">
-                <a:solidFill>
-                  <a:srgbClr val="1E293B"/>
-                </a:solidFill>
-              </a:defRPr>
-            </a:pPr>
-            <a:r>
-              <a:t>   Each new peer downloading the file ALSO contributes its upload capacity $u_i$ to assist other peers, keeping distribution time bounded.</a:t>
+              <a:defRPr sz="1250">
+                <a:solidFill>
+                  <a:srgbClr val="0F172A"/>
+                </a:solidFill>
+              </a:defRPr>
+            </a:pPr>
+            <a:r>
+              <a:t>   As $N \to \infty$, the total upload capacity $(u_s + \sum u_i)$ scales proportionally with demand $N \cdot F$, bounding distribution time to a sub-linear / constant asymptote.</a:t>
             </a:r>
           </a:p>
         </p:txBody>
@@ -3594,14 +3732,14 @@
         </p:nvSpPr>
         <p:spPr>
           <a:xfrm>
-            <a:off x="7955279" y="1280160"/>
-            <a:ext cx="3566160" cy="4846320"/>
+            <a:off x="7955279" y="1234440"/>
+            <a:ext cx="3566160" cy="4892040"/>
           </a:xfrm>
           <a:prstGeom prst="roundRect">
             <a:avLst/>
           </a:prstGeom>
           <a:solidFill>
-            <a:srgbClr val="F1F5F9"/>
+            <a:srgbClr val="F8FAFC"/>
           </a:solidFill>
           <a:ln w="19050">
             <a:solidFill>
@@ -3639,7 +3777,7 @@
         </p:nvSpPr>
         <p:spPr>
           <a:xfrm>
-            <a:off x="8138160" y="1417320"/>
+            <a:off x="8138160" y="1371600"/>
             <a:ext cx="3200400" cy="4572000"/>
           </a:xfrm>
           <a:prstGeom prst="rect">
@@ -3664,7 +3802,7 @@
               </a:defRPr>
             </a:pPr>
             <a:r>
-              <a:t>Scalability Comparison</a:t>
+              <a:t>Scalability Formulas</a:t>
             </a:r>
           </a:p>
           <a:p>
@@ -3674,12 +3812,12 @@
               </a:spcAft>
               <a:defRPr sz="1200">
                 <a:solidFill>
-                  <a:srgbClr val="1E293B"/>
-                </a:solidFill>
-              </a:defRPr>
-            </a:pPr>
-            <a:r>
-              <a:t>→ Client-Server: O(N) linear growth</a:t>
+                  <a:srgbClr val="0F172A"/>
+                </a:solidFill>
+              </a:defRPr>
+            </a:pPr>
+            <a:r>
+              <a:t>→ D_CS &gt;= max(N*F/u_s, F/d_min)</a:t>
             </a:r>
           </a:p>
           <a:p>
@@ -3689,12 +3827,12 @@
               </a:spcAft>
               <a:defRPr sz="1200">
                 <a:solidFill>
-                  <a:srgbClr val="1E293B"/>
-                </a:solidFill>
-              </a:defRPr>
-            </a:pPr>
-            <a:r>
-              <a:t>→ P2P: Sub-linear, asymptotically bounded</a:t>
+                  <a:srgbClr val="0F172A"/>
+                </a:solidFill>
+              </a:defRPr>
+            </a:pPr>
+            <a:r>
+              <a:t>→ D_P2P &gt;= max(F/u_s, F/d_min, N*F / (u_s + sum(u_i)))</a:t>
             </a:r>
           </a:p>
           <a:p>
@@ -3704,12 +3842,12 @@
               </a:spcAft>
               <a:defRPr sz="1200">
                 <a:solidFill>
-                  <a:srgbClr val="1E293B"/>
-                </a:solidFill>
-              </a:defRPr>
-            </a:pPr>
-            <a:r>
-              <a:t>→ u_s: Server upload capacity</a:t>
+                  <a:srgbClr val="0F172A"/>
+                </a:solidFill>
+              </a:defRPr>
+            </a:pPr>
+            <a:r>
+              <a:t>→ Client-Server scales O(N)</a:t>
             </a:r>
           </a:p>
           <a:p>
@@ -3719,12 +3857,12 @@
               </a:spcAft>
               <a:defRPr sz="1200">
                 <a:solidFill>
-                  <a:srgbClr val="1E293B"/>
-                </a:solidFill>
-              </a:defRPr>
-            </a:pPr>
-            <a:r>
-              <a:t>→ d_min: Minimum client download speed</a:t>
+                  <a:srgbClr val="0F172A"/>
+                </a:solidFill>
+              </a:defRPr>
+            </a:pPr>
+            <a:r>
+              <a:t>→ P2P scales O(1) / O(log N)</a:t>
             </a:r>
           </a:p>
           <a:p>
@@ -3734,12 +3872,12 @@
               </a:spcAft>
               <a:defRPr sz="1200">
                 <a:solidFill>
-                  <a:srgbClr val="1E293B"/>
-                </a:solidFill>
-              </a:defRPr>
-            </a:pPr>
-            <a:r>
-              <a:t>→ sum(u_i): Aggregate peer upload rate</a:t>
+                  <a:srgbClr val="0F172A"/>
+                </a:solidFill>
+              </a:defRPr>
+            </a:pPr>
+            <a:r>
+              <a:t>→ Peers act as uploaders</a:t>
             </a:r>
           </a:p>
         </p:txBody>
@@ -3752,8 +3890,8 @@
         </p:nvSpPr>
         <p:spPr>
           <a:xfrm>
-            <a:off x="731520" y="6309360"/>
-            <a:ext cx="10789920" cy="365760"/>
+            <a:off x="731520" y="6327648"/>
+            <a:ext cx="10789920" cy="320040"/>
           </a:xfrm>
           <a:prstGeom prst="rect">
             <a:avLst/>
@@ -3775,6 +3913,41 @@
             </a:pPr>
             <a:r>
               <a:t>PCCST501 Computer Networks | KTU 2024 Scheme | Prof. Anju Markose | Assistant Professor, Dept. of CSE | VJCET</a:t>
+            </a:r>
+          </a:p>
+        </p:txBody>
+      </p:sp>
+      <p:sp>
+        <p:nvSpPr>
+          <p:cNvPr id="10" name="TextBox 9"/>
+          <p:cNvSpPr txBox="1"/>
+          <p:nvPr/>
+        </p:nvSpPr>
+        <p:spPr>
+          <a:xfrm>
+            <a:off x="6858000" y="6327648"/>
+            <a:ext cx="4572000" cy="320040"/>
+          </a:xfrm>
+          <a:prstGeom prst="rect">
+            <a:avLst/>
+          </a:prstGeom>
+          <a:noFill/>
+        </p:spPr>
+        <p:txBody>
+          <a:bodyPr wrap="none">
+            <a:spAutoFit/>
+          </a:bodyPr>
+          <a:lstStyle/>
+          <a:p>
+            <a:pPr algn="r">
+              <a:defRPr sz="950">
+                <a:solidFill>
+                  <a:srgbClr val="64748B"/>
+                </a:solidFill>
+              </a:defRPr>
+            </a:pPr>
+            <a:r>
+              <a:t>Dept. of CSE, VJCET</a:t>
             </a:r>
           </a:p>
         </p:txBody>
@@ -3906,14 +4079,14 @@
           <a:lstStyle/>
           <a:p>
             <a:pPr>
-              <a:defRPr b="1" sz="2300">
+              <a:defRPr b="1" sz="2200">
                 <a:solidFill>
                   <a:srgbClr val="F8FAFC"/>
                 </a:solidFill>
               </a:defRPr>
             </a:pPr>
             <a:r>
-              <a:t>1.8.2 BitTorrent Architecture &amp; Swarm Coordination</a:t>
+              <a:t>1.8.2 BitTorrent Protocol Architecture &amp; Mechanics</a:t>
             </a:r>
           </a:p>
         </p:txBody>
@@ -3948,7 +4121,7 @@
               </a:defRPr>
             </a:pPr>
             <a:r>
-              <a:t>M1.8 BITTORRENT ARCHITECTURE</a:t>
+              <a:t>M1.8 BITTORRENT PROTOCOL</a:t>
             </a:r>
           </a:p>
         </p:txBody>
@@ -3961,7 +4134,7 @@
         </p:nvSpPr>
         <p:spPr>
           <a:xfrm>
-            <a:off x="731520" y="1280160"/>
+            <a:off x="731520" y="1234440"/>
             <a:ext cx="6858000" cy="4937760"/>
           </a:xfrm>
           <a:prstGeom prst="rect">
@@ -3979,29 +4152,29 @@
               <a:spcAft>
                 <a:spcPts val="200"/>
               </a:spcAft>
-              <a:defRPr b="1" sz="1500">
+              <a:defRPr b="1" sz="1450">
                 <a:solidFill>
                   <a:srgbClr val="0F1E4A"/>
                 </a:solidFill>
               </a:defRPr>
             </a:pPr>
             <a:r>
-              <a:t>• BitTorrent Fundamentals</a:t>
+              <a:t>• Torrents &amp; Swarms</a:t>
             </a:r>
           </a:p>
           <a:p>
             <a:pPr>
               <a:spcAft>
-                <a:spcPts val="800"/>
+                <a:spcPts val="700"/>
               </a:spcAft>
-              <a:defRPr sz="1300">
-                <a:solidFill>
-                  <a:srgbClr val="1E293B"/>
-                </a:solidFill>
-              </a:defRPr>
-            </a:pPr>
-            <a:r>
-              <a:t>   A popular P2P protocol for distributing large files efficiently across thousands of cooperating peers.</a:t>
+              <a:defRPr sz="1250">
+                <a:solidFill>
+                  <a:srgbClr val="0F172A"/>
+                </a:solidFill>
+              </a:defRPr>
+            </a:pPr>
+            <a:r>
+              <a:t>   The collection of all peers participating in the distribution of a specific file is called a Swarm. File metadata is encoded in a `.torrent` file containing SHA-1 hashes of chunks.</a:t>
             </a:r>
           </a:p>
           <a:p>
@@ -4009,29 +4182,29 @@
               <a:spcAft>
                 <a:spcPts val="200"/>
               </a:spcAft>
-              <a:defRPr b="1" sz="1500">
+              <a:defRPr b="1" sz="1450">
                 <a:solidFill>
                   <a:srgbClr val="0F1E4A"/>
                 </a:solidFill>
               </a:defRPr>
             </a:pPr>
             <a:r>
-              <a:t>• Torrent &amp; Chunks</a:t>
+              <a:t>• Chunks &amp; Pieces</a:t>
             </a:r>
           </a:p>
           <a:p>
             <a:pPr>
               <a:spcAft>
-                <a:spcPts val="800"/>
+                <a:spcPts val="700"/>
               </a:spcAft>
-              <a:defRPr sz="1300">
-                <a:solidFill>
-                  <a:srgbClr val="1E293B"/>
-                </a:solidFill>
-              </a:defRPr>
-            </a:pPr>
-            <a:r>
-              <a:t>   Target file is split into fixed-size chunks (typically 256 KB). A `.torrent` metadata file contains chunk cryptographic hashes and tracker URL.</a:t>
+              <a:defRPr sz="1250">
+                <a:solidFill>
+                  <a:srgbClr val="0F172A"/>
+                </a:solidFill>
+              </a:defRPr>
+            </a:pPr>
+            <a:r>
+              <a:t>   The file is partitioned into equal chunks (typically 256 KB to 2 MB). As soon as a peer downloads a chunk, it can immediately upload it to other peers.</a:t>
             </a:r>
           </a:p>
           <a:p>
@@ -4039,29 +4212,29 @@
               <a:spcAft>
                 <a:spcPts val="200"/>
               </a:spcAft>
-              <a:defRPr b="1" sz="1500">
+              <a:defRPr b="1" sz="1450">
                 <a:solidFill>
                   <a:srgbClr val="0F1E4A"/>
                 </a:solidFill>
               </a:defRPr>
             </a:pPr>
             <a:r>
-              <a:t>• Tracker &amp; Swarm</a:t>
+              <a:t>• Tracker &amp; Trackerless DHT</a:t>
             </a:r>
           </a:p>
           <a:p>
             <a:pPr>
               <a:spcAft>
-                <a:spcPts val="800"/>
+                <a:spcPts val="700"/>
               </a:spcAft>
-              <a:defRPr sz="1300">
-                <a:solidFill>
-                  <a:srgbClr val="1E293B"/>
-                </a:solidFill>
-              </a:defRPr>
-            </a:pPr>
-            <a:r>
-              <a:t>   A centralized server (or distributed DHT) that tracks all peers currently downloading/uploading the torrent. The collection of participating peers is the 'Swarm'.</a:t>
+              <a:defRPr sz="1250">
+                <a:solidFill>
+                  <a:srgbClr val="0F172A"/>
+                </a:solidFill>
+              </a:defRPr>
+            </a:pPr>
+            <a:r>
+              <a:t>   A central Tracker node maintains the list of active IP addresses in the swarm. Modern BitTorrent uses Kademlia Distributed Hash Tables (DHT) for trackerless operation.</a:t>
             </a:r>
           </a:p>
           <a:p>
@@ -4069,29 +4242,89 @@
               <a:spcAft>
                 <a:spcPts val="200"/>
               </a:spcAft>
-              <a:defRPr b="1" sz="1500">
+              <a:defRPr b="1" sz="1450">
                 <a:solidFill>
                   <a:srgbClr val="0F1E4A"/>
                 </a:solidFill>
               </a:defRPr>
             </a:pPr>
             <a:r>
-              <a:t>• Leechers vs Seeders</a:t>
+              <a:t>• Rarest-First Chunk Selection</a:t>
             </a:r>
           </a:p>
           <a:p>
             <a:pPr>
               <a:spcAft>
-                <a:spcPts val="800"/>
+                <a:spcPts val="700"/>
               </a:spcAft>
-              <a:defRPr sz="1300">
-                <a:solidFill>
-                  <a:srgbClr val="1E293B"/>
-                </a:solidFill>
-              </a:defRPr>
-            </a:pPr>
-            <a:r>
-              <a:t>   Leechers: Peers still downloading missing chunks while uploading acquired ones. Seeders: Peers possessing 100% of file chunks who remain online solely to upload.</a:t>
+              <a:defRPr sz="1250">
+                <a:solidFill>
+                  <a:srgbClr val="0F172A"/>
+                </a:solidFill>
+              </a:defRPr>
+            </a:pPr>
+            <a:r>
+              <a:t>   A peer determines which chunks are least common among its neighbors and requests those first. Ensures rare chunks are duplicated rapidly across the swarm to prevent missing chunk bottlenecks.</a:t>
+            </a:r>
+          </a:p>
+          <a:p>
+            <a:pPr>
+              <a:spcAft>
+                <a:spcPts val="200"/>
+              </a:spcAft>
+              <a:defRPr b="1" sz="1450">
+                <a:solidFill>
+                  <a:srgbClr val="0F1E4A"/>
+                </a:solidFill>
+              </a:defRPr>
+            </a:pPr>
+            <a:r>
+              <a:t>• Tit-for-Tat (TFT) Choking Algorithm</a:t>
+            </a:r>
+          </a:p>
+          <a:p>
+            <a:pPr>
+              <a:spcAft>
+                <a:spcPts val="700"/>
+              </a:spcAft>
+              <a:defRPr sz="1250">
+                <a:solidFill>
+                  <a:srgbClr val="0F172A"/>
+                </a:solidFill>
+              </a:defRPr>
+            </a:pPr>
+            <a:r>
+              <a:t>   A peer gives upload priority to the top 4 peers currently supplying data to it at the highest rates (unchoked every 10 s).</a:t>
+            </a:r>
+          </a:p>
+          <a:p>
+            <a:pPr>
+              <a:spcAft>
+                <a:spcPts val="200"/>
+              </a:spcAft>
+              <a:defRPr b="1" sz="1450">
+                <a:solidFill>
+                  <a:srgbClr val="0F1E4A"/>
+                </a:solidFill>
+              </a:defRPr>
+            </a:pPr>
+            <a:r>
+              <a:t>• Optimistic Unchoking</a:t>
+            </a:r>
+          </a:p>
+          <a:p>
+            <a:pPr>
+              <a:spcAft>
+                <a:spcPts val="700"/>
+              </a:spcAft>
+              <a:defRPr sz="1250">
+                <a:solidFill>
+                  <a:srgbClr val="0F172A"/>
+                </a:solidFill>
+              </a:defRPr>
+            </a:pPr>
+            <a:r>
+              <a:t>   Every 30 s, a peer randomly picks 1 additional peer to upload to, discovering new faster partners and allowing newcomers to obtain their initial chunk.</a:t>
             </a:r>
           </a:p>
         </p:txBody>
@@ -4104,14 +4337,14 @@
         </p:nvSpPr>
         <p:spPr>
           <a:xfrm>
-            <a:off x="7955279" y="1280160"/>
-            <a:ext cx="3566160" cy="4846320"/>
+            <a:off x="7955279" y="1234440"/>
+            <a:ext cx="3566160" cy="4892040"/>
           </a:xfrm>
           <a:prstGeom prst="roundRect">
             <a:avLst/>
           </a:prstGeom>
           <a:solidFill>
-            <a:srgbClr val="F1F5F9"/>
+            <a:srgbClr val="F8FAFC"/>
           </a:solidFill>
           <a:ln w="19050">
             <a:solidFill>
@@ -4149,7 +4382,7 @@
         </p:nvSpPr>
         <p:spPr>
           <a:xfrm>
-            <a:off x="8138160" y="1417320"/>
+            <a:off x="8138160" y="1371600"/>
             <a:ext cx="3200400" cy="4572000"/>
           </a:xfrm>
           <a:prstGeom prst="rect">
@@ -4174,7 +4407,7 @@
               </a:defRPr>
             </a:pPr>
             <a:r>
-              <a:t>BitTorrent Components</a:t>
+              <a:t>BitTorrent Mechanics</a:t>
             </a:r>
           </a:p>
           <a:p>
@@ -4184,12 +4417,12 @@
               </a:spcAft>
               <a:defRPr sz="1200">
                 <a:solidFill>
-                  <a:srgbClr val="1E293B"/>
-                </a:solidFill>
-              </a:defRPr>
-            </a:pPr>
-            <a:r>
-              <a:t>→ Torrent File: Metadata descriptor</a:t>
+                  <a:srgbClr val="0F172A"/>
+                </a:solidFill>
+              </a:defRPr>
+            </a:pPr>
+            <a:r>
+              <a:t>→ Swarm: Group of active peers</a:t>
             </a:r>
           </a:p>
           <a:p>
@@ -4199,12 +4432,12 @@
               </a:spcAft>
               <a:defRPr sz="1200">
                 <a:solidFill>
-                  <a:srgbClr val="1E293B"/>
-                </a:solidFill>
-              </a:defRPr>
-            </a:pPr>
-            <a:r>
-              <a:t>→ Tracker: Coordinates active peer list</a:t>
+                  <a:srgbClr val="0F172A"/>
+                </a:solidFill>
+              </a:defRPr>
+            </a:pPr>
+            <a:r>
+              <a:t>→ Chunk Size: 256 KB - 2 MB</a:t>
             </a:r>
           </a:p>
           <a:p>
@@ -4214,12 +4447,12 @@
               </a:spcAft>
               <a:defRPr sz="1200">
                 <a:solidFill>
-                  <a:srgbClr val="1E293B"/>
-                </a:solidFill>
-              </a:defRPr>
-            </a:pPr>
-            <a:r>
-              <a:t>→ Swarm: Entire pool of active peers</a:t>
+                  <a:srgbClr val="0F172A"/>
+                </a:solidFill>
+              </a:defRPr>
+            </a:pPr>
+            <a:r>
+              <a:t>→ Rarest-First: Balances supply</a:t>
             </a:r>
           </a:p>
           <a:p>
@@ -4229,12 +4462,12 @@
               </a:spcAft>
               <a:defRPr sz="1200">
                 <a:solidFill>
-                  <a:srgbClr val="1E293B"/>
-                </a:solidFill>
-              </a:defRPr>
-            </a:pPr>
-            <a:r>
-              <a:t>→ Chunks: 256 KB file fragments</a:t>
+                  <a:srgbClr val="0F172A"/>
+                </a:solidFill>
+              </a:defRPr>
+            </a:pPr>
+            <a:r>
+              <a:t>→ Tit-for-Tat: Incentivizes uploading</a:t>
             </a:r>
           </a:p>
           <a:p>
@@ -4244,12 +4477,27 @@
               </a:spcAft>
               <a:defRPr sz="1200">
                 <a:solidFill>
-                  <a:srgbClr val="1E293B"/>
-                </a:solidFill>
-              </a:defRPr>
-            </a:pPr>
-            <a:r>
-              <a:t>→ SHA-1 Hashes: Verify chunk integrity</a:t>
+                  <a:srgbClr val="0F172A"/>
+                </a:solidFill>
+              </a:defRPr>
+            </a:pPr>
+            <a:r>
+              <a:t>→ Optimistic Unchoking: Finds peers</a:t>
+            </a:r>
+          </a:p>
+          <a:p>
+            <a:pPr>
+              <a:spcAft>
+                <a:spcPts val="600"/>
+              </a:spcAft>
+              <a:defRPr sz="1200">
+                <a:solidFill>
+                  <a:srgbClr val="0F172A"/>
+                </a:solidFill>
+              </a:defRPr>
+            </a:pPr>
+            <a:r>
+              <a:t>→ Seeders: 100% complete file</a:t>
             </a:r>
           </a:p>
         </p:txBody>
@@ -4262,8 +4510,8 @@
         </p:nvSpPr>
         <p:spPr>
           <a:xfrm>
-            <a:off x="731520" y="6309360"/>
-            <a:ext cx="10789920" cy="365760"/>
+            <a:off x="731520" y="6327648"/>
+            <a:ext cx="10789920" cy="320040"/>
           </a:xfrm>
           <a:prstGeom prst="rect">
             <a:avLst/>
@@ -4285,6 +4533,41 @@
             </a:pPr>
             <a:r>
               <a:t>PCCST501 Computer Networks | KTU 2024 Scheme | Prof. Anju Markose | Assistant Professor, Dept. of CSE | VJCET</a:t>
+            </a:r>
+          </a:p>
+        </p:txBody>
+      </p:sp>
+      <p:sp>
+        <p:nvSpPr>
+          <p:cNvPr id="10" name="TextBox 9"/>
+          <p:cNvSpPr txBox="1"/>
+          <p:nvPr/>
+        </p:nvSpPr>
+        <p:spPr>
+          <a:xfrm>
+            <a:off x="6858000" y="6327648"/>
+            <a:ext cx="4572000" cy="320040"/>
+          </a:xfrm>
+          <a:prstGeom prst="rect">
+            <a:avLst/>
+          </a:prstGeom>
+          <a:noFill/>
+        </p:spPr>
+        <p:txBody>
+          <a:bodyPr wrap="none">
+            <a:spAutoFit/>
+          </a:bodyPr>
+          <a:lstStyle/>
+          <a:p>
+            <a:pPr algn="r">
+              <a:defRPr sz="950">
+                <a:solidFill>
+                  <a:srgbClr val="64748B"/>
+                </a:solidFill>
+              </a:defRPr>
+            </a:pPr>
+            <a:r>
+              <a:t>Dept. of CSE, VJCET</a:t>
             </a:r>
           </a:p>
         </p:txBody>
@@ -4416,14 +4699,14 @@
           <a:lstStyle/>
           <a:p>
             <a:pPr>
-              <a:defRPr b="1" sz="2300">
+              <a:defRPr b="1" sz="2100">
                 <a:solidFill>
                   <a:srgbClr val="F8FAFC"/>
                 </a:solidFill>
               </a:defRPr>
             </a:pPr>
             <a:r>
-              <a:t>1.8.3 BitTorrent Algorithms: Rarest-First &amp; Tit-for-Tat</a:t>
+              <a:t>🎯 Exam Booster &amp; Review: P2P &amp; BitTorrent</a:t>
             </a:r>
           </a:p>
         </p:txBody>
@@ -4458,174 +4741,31 @@
               </a:defRPr>
             </a:pPr>
             <a:r>
-              <a:t>M1.8 BITTORRENT ALGORITHMS</a:t>
-            </a:r>
-          </a:p>
-        </p:txBody>
-      </p:sp>
-      <p:sp>
-        <p:nvSpPr>
-          <p:cNvPr id="6" name="TextBox 5"/>
-          <p:cNvSpPr txBox="1"/>
-          <p:nvPr/>
-        </p:nvSpPr>
-        <p:spPr>
-          <a:xfrm>
-            <a:off x="731520" y="1280160"/>
-            <a:ext cx="6858000" cy="4937760"/>
-          </a:xfrm>
-          <a:prstGeom prst="rect">
-            <a:avLst/>
-          </a:prstGeom>
-          <a:noFill/>
-        </p:spPr>
-        <p:txBody>
-          <a:bodyPr wrap="square">
-            <a:spAutoFit/>
-          </a:bodyPr>
-          <a:lstStyle/>
-          <a:p>
-            <a:pPr>
-              <a:spcAft>
-                <a:spcPts val="200"/>
-              </a:spcAft>
-              <a:defRPr b="1" sz="1500">
-                <a:solidFill>
-                  <a:srgbClr val="0F1E4A"/>
-                </a:solidFill>
-              </a:defRPr>
-            </a:pPr>
-            <a:r>
-              <a:t>• Rarest-First Chunk Selection</a:t>
-            </a:r>
-          </a:p>
-          <a:p>
-            <a:pPr>
-              <a:spcAft>
-                <a:spcPts val="800"/>
-              </a:spcAft>
-              <a:defRPr sz="1300">
-                <a:solidFill>
-                  <a:srgbClr val="1E293B"/>
-                </a:solidFill>
-              </a:defRPr>
-            </a:pPr>
-            <a:r>
-              <a:t>   Peers determine which chunks are least common among their connected neighbors and request those first. Prevents rarest chunks from disappearing and maximizes chunk diversity.</a:t>
-            </a:r>
-          </a:p>
-          <a:p>
-            <a:pPr>
-              <a:spcAft>
-                <a:spcPts val="200"/>
-              </a:spcAft>
-              <a:defRPr b="1" sz="1500">
-                <a:solidFill>
-                  <a:srgbClr val="0F1E4A"/>
-                </a:solidFill>
-              </a:defRPr>
-            </a:pPr>
-            <a:r>
-              <a:t>• Tit-for-Tat (TFT) Choking Algorithm</a:t>
-            </a:r>
-          </a:p>
-          <a:p>
-            <a:pPr>
-              <a:spcAft>
-                <a:spcPts val="800"/>
-              </a:spcAft>
-              <a:defRPr sz="1300">
-                <a:solidFill>
-                  <a:srgbClr val="1E293B"/>
-                </a:solidFill>
-              </a:defRPr>
-            </a:pPr>
-            <a:r>
-              <a:t>   Incentivizes uploading. Peer measures upload rates from all neighbors and 'unchokes' the top 4 fastest uploaders. Other neighbors are 'choked' (no data sent). Re-evaluated every 10s.</a:t>
-            </a:r>
-          </a:p>
-          <a:p>
-            <a:pPr>
-              <a:spcAft>
-                <a:spcPts val="200"/>
-              </a:spcAft>
-              <a:defRPr b="1" sz="1500">
-                <a:solidFill>
-                  <a:srgbClr val="0F1E4A"/>
-                </a:solidFill>
-              </a:defRPr>
-            </a:pPr>
-            <a:r>
-              <a:t>• Optimistic Unchoking</a:t>
-            </a:r>
-          </a:p>
-          <a:p>
-            <a:pPr>
-              <a:spcAft>
-                <a:spcPts val="800"/>
-              </a:spcAft>
-              <a:defRPr sz="1300">
-                <a:solidFill>
-                  <a:srgbClr val="1E293B"/>
-                </a:solidFill>
-              </a:defRPr>
-            </a:pPr>
-            <a:r>
-              <a:t>   Every 30 seconds, a peer randomly unchokes one additional choked neighbor. Allows discovering new peers with potentially faster upload speeds and lets newly joined leechers acquire their first chunk.</a:t>
-            </a:r>
-          </a:p>
-          <a:p>
-            <a:pPr>
-              <a:spcAft>
-                <a:spcPts val="200"/>
-              </a:spcAft>
-              <a:defRPr b="1" sz="1500">
-                <a:solidFill>
-                  <a:srgbClr val="0F1E4A"/>
-                </a:solidFill>
-              </a:defRPr>
-            </a:pPr>
-            <a:r>
-              <a:t>• Free-Rider Mitigation</a:t>
-            </a:r>
-          </a:p>
-          <a:p>
-            <a:pPr>
-              <a:spcAft>
-                <a:spcPts val="800"/>
-              </a:spcAft>
-              <a:defRPr sz="1300">
-                <a:solidFill>
-                  <a:srgbClr val="1E293B"/>
-                </a:solidFill>
-              </a:defRPr>
-            </a:pPr>
-            <a:r>
-              <a:t>   Tit-for-Tat discourages free-riders (peers that download without uploading) by starving them of high-speed data feeds.</a:t>
-            </a:r>
-          </a:p>
-        </p:txBody>
-      </p:sp>
-      <p:sp>
-        <p:nvSpPr>
-          <p:cNvPr id="7" name="Rounded Rectangle 6"/>
+              <a:t>M1.8</a:t>
+            </a:r>
+          </a:p>
+        </p:txBody>
+      </p:sp>
+      <p:sp>
+        <p:nvSpPr>
+          <p:cNvPr id="6" name="Rounded Rectangle 5"/>
           <p:cNvSpPr/>
           <p:nvPr/>
         </p:nvSpPr>
         <p:spPr>
           <a:xfrm>
-            <a:off x="7955279" y="1280160"/>
-            <a:ext cx="3566160" cy="4846320"/>
+            <a:off x="731520" y="1234440"/>
+            <a:ext cx="5303520" cy="4892040"/>
           </a:xfrm>
           <a:prstGeom prst="roundRect">
             <a:avLst/>
           </a:prstGeom>
           <a:solidFill>
-            <a:srgbClr val="F1F5F9"/>
+            <a:srgbClr val="FEF3C7"/>
           </a:solidFill>
           <a:ln w="19050">
             <a:solidFill>
-              <a:srgbClr val="0E7490"/>
+              <a:srgbClr val="D97706"/>
             </a:solidFill>
           </a:ln>
         </p:spPr>
@@ -4653,14 +4793,14 @@
       </p:sp>
       <p:sp>
         <p:nvSpPr>
-          <p:cNvPr id="8" name="TextBox 7"/>
+          <p:cNvPr id="7" name="TextBox 6"/>
           <p:cNvSpPr txBox="1"/>
           <p:nvPr/>
         </p:nvSpPr>
         <p:spPr>
           <a:xfrm>
-            <a:off x="8138160" y="1417320"/>
-            <a:ext cx="3200400" cy="4572000"/>
+            <a:off x="914400" y="1371600"/>
+            <a:ext cx="4937760" cy="4572000"/>
           </a:xfrm>
           <a:prstGeom prst="rect">
             <a:avLst/>
@@ -4677,14 +4817,142 @@
               <a:spcAft>
                 <a:spcPts val="1000"/>
               </a:spcAft>
-              <a:defRPr b="1" sz="1500">
+              <a:defRPr b="1" sz="1450">
+                <a:solidFill>
+                  <a:srgbClr val="D97706"/>
+                </a:solidFill>
+              </a:defRPr>
+            </a:pPr>
+            <a:r>
+              <a:t>📚 KTU High-Yield Questions (K3 Apply)</a:t>
+            </a:r>
+          </a:p>
+          <a:p>
+            <a:pPr>
+              <a:spcAft>
+                <a:spcPts val="700"/>
+              </a:spcAft>
+              <a:defRPr sz="1200">
+                <a:solidFill>
+                  <a:srgbClr val="0F172A"/>
+                </a:solidFill>
+              </a:defRPr>
+            </a:pPr>
+            <a:r>
+              <a:t>Q: Derive the theoretical file distribution time for Client-Server ($D_{CS}$) and P2P ($D_{P2P}$) architectures. (8 Marks)</a:t>
+            </a:r>
+          </a:p>
+          <a:p>
+            <a:pPr>
+              <a:spcAft>
+                <a:spcPts val="700"/>
+              </a:spcAft>
+              <a:defRPr sz="1200">
+                <a:solidFill>
+                  <a:srgbClr val="0F172A"/>
+                </a:solidFill>
+              </a:defRPr>
+            </a:pPr>
+            <a:r>
+              <a:t>Q: Explain the working of BitTorrent with focus on Rarest-First chunk selection, Tit-for-Tat choking, and Optimistic Unchoking. (8 Marks)</a:t>
+            </a:r>
+          </a:p>
+          <a:p>
+            <a:pPr>
+              <a:spcAft>
+                <a:spcPts val="700"/>
+              </a:spcAft>
+              <a:defRPr sz="1200">
+                <a:solidFill>
+                  <a:srgbClr val="0F172A"/>
+                </a:solidFill>
+              </a:defRPr>
+            </a:pPr>
+            <a:r>
+              <a:t>Q: What is peer churn in P2P networks, and how does Distributed Hash Table (DHT) handle it? (5 Marks)</a:t>
+            </a:r>
+          </a:p>
+        </p:txBody>
+      </p:sp>
+      <p:sp>
+        <p:nvSpPr>
+          <p:cNvPr id="8" name="Rounded Rectangle 7"/>
+          <p:cNvSpPr/>
+          <p:nvPr/>
+        </p:nvSpPr>
+        <p:spPr>
+          <a:xfrm>
+            <a:off x="6309360" y="1234440"/>
+            <a:ext cx="5212080" cy="4892040"/>
+          </a:xfrm>
+          <a:prstGeom prst="roundRect">
+            <a:avLst/>
+          </a:prstGeom>
+          <a:solidFill>
+            <a:srgbClr val="EEF2FF"/>
+          </a:solidFill>
+          <a:ln w="19050">
+            <a:solidFill>
+              <a:srgbClr val="0E7490"/>
+            </a:solidFill>
+          </a:ln>
+        </p:spPr>
+        <p:style>
+          <a:lnRef idx="1">
+            <a:schemeClr val="accent1"/>
+          </a:lnRef>
+          <a:fillRef idx="3">
+            <a:schemeClr val="accent1"/>
+          </a:fillRef>
+          <a:effectRef idx="2">
+            <a:schemeClr val="accent1"/>
+          </a:effectRef>
+          <a:fontRef idx="minor">
+            <a:schemeClr val="lt1"/>
+          </a:fontRef>
+        </p:style>
+        <p:txBody>
+          <a:bodyPr rtlCol="0" anchor="ctr"/>
+          <a:lstStyle/>
+          <a:p>
+            <a:pPr algn="ctr"/>
+          </a:p>
+        </p:txBody>
+      </p:sp>
+      <p:sp>
+        <p:nvSpPr>
+          <p:cNvPr id="9" name="TextBox 8"/>
+          <p:cNvSpPr txBox="1"/>
+          <p:nvPr/>
+        </p:nvSpPr>
+        <p:spPr>
+          <a:xfrm>
+            <a:off x="6492240" y="1371600"/>
+            <a:ext cx="4846320" cy="4572000"/>
+          </a:xfrm>
+          <a:prstGeom prst="rect">
+            <a:avLst/>
+          </a:prstGeom>
+          <a:noFill/>
+        </p:spPr>
+        <p:txBody>
+          <a:bodyPr wrap="square">
+            <a:spAutoFit/>
+          </a:bodyPr>
+          <a:lstStyle/>
+          <a:p>
+            <a:pPr>
+              <a:spcAft>
+                <a:spcPts val="1000"/>
+              </a:spcAft>
+              <a:defRPr b="1" sz="1450">
                 <a:solidFill>
                   <a:srgbClr val="0E7490"/>
                 </a:solidFill>
               </a:defRPr>
             </a:pPr>
             <a:r>
-              <a:t>Key Takeaways</a:t>
+              <a:t>💡 Critical Conceptual Takeaways</a:t>
             </a:r>
           </a:p>
           <a:p>
@@ -4694,12 +4962,12 @@
               </a:spcAft>
               <a:defRPr sz="1200">
                 <a:solidFill>
-                  <a:srgbClr val="1E293B"/>
-                </a:solidFill>
-              </a:defRPr>
-            </a:pPr>
-            <a:r>
-              <a:t>→ Rarest-First: Balances chunk supply</a:t>
+                  <a:srgbClr val="0F172A"/>
+                </a:solidFill>
+              </a:defRPr>
+            </a:pPr>
+            <a:r>
+              <a:t>✔ Client-Server distribution time increases linearly with $N$, whereas P2P distributes the upload burden.</a:t>
             </a:r>
           </a:p>
           <a:p>
@@ -4709,12 +4977,12 @@
               </a:spcAft>
               <a:defRPr sz="1200">
                 <a:solidFill>
-                  <a:srgbClr val="1E293B"/>
-                </a:solidFill>
-              </a:defRPr>
-            </a:pPr>
-            <a:r>
-              <a:t>→ Top 4 Unchoked: Rewards fast peers</a:t>
+                  <a:srgbClr val="0F172A"/>
+                </a:solidFill>
+              </a:defRPr>
+            </a:pPr>
+            <a:r>
+              <a:t>✔ Rarest-First ensures even chunk distribution across the swarm.</a:t>
             </a:r>
           </a:p>
           <a:p>
@@ -4724,41 +4992,26 @@
               </a:spcAft>
               <a:defRPr sz="1200">
                 <a:solidFill>
-                  <a:srgbClr val="1E293B"/>
-                </a:solidFill>
-              </a:defRPr>
-            </a:pPr>
-            <a:r>
-              <a:t>→ Optimistic Unchoke: Discovers new links</a:t>
-            </a:r>
-          </a:p>
-          <a:p>
-            <a:pPr>
-              <a:spcAft>
-                <a:spcPts val="600"/>
-              </a:spcAft>
-              <a:defRPr sz="1200">
-                <a:solidFill>
-                  <a:srgbClr val="1E293B"/>
-                </a:solidFill>
-              </a:defRPr>
-            </a:pPr>
-            <a:r>
-              <a:t>→ TFT cycle: 10s; Opt unchoke: 30s</a:t>
-            </a:r>
-          </a:p>
-        </p:txBody>
-      </p:sp>
-      <p:sp>
-        <p:nvSpPr>
-          <p:cNvPr id="9" name="TextBox 8"/>
+                  <a:srgbClr val="0F172A"/>
+                </a:solidFill>
+              </a:defRPr>
+            </a:pPr>
+            <a:r>
+              <a:t>✔ Tit-for-Tat solves free-riding by rewarding peers who contribute upload bandwidth.</a:t>
+            </a:r>
+          </a:p>
+        </p:txBody>
+      </p:sp>
+      <p:sp>
+        <p:nvSpPr>
+          <p:cNvPr id="10" name="TextBox 9"/>
           <p:cNvSpPr txBox="1"/>
           <p:nvPr/>
         </p:nvSpPr>
         <p:spPr>
           <a:xfrm>
-            <a:off x="731520" y="6309360"/>
-            <a:ext cx="10789920" cy="365760"/>
+            <a:off x="731520" y="6327648"/>
+            <a:ext cx="10789920" cy="320040"/>
           </a:xfrm>
           <a:prstGeom prst="rect">
             <a:avLst/>
@@ -4780,6 +5033,41 @@
             </a:pPr>
             <a:r>
               <a:t>PCCST501 Computer Networks | KTU 2024 Scheme | Prof. Anju Markose | Assistant Professor, Dept. of CSE | VJCET</a:t>
+            </a:r>
+          </a:p>
+        </p:txBody>
+      </p:sp>
+      <p:sp>
+        <p:nvSpPr>
+          <p:cNvPr id="11" name="TextBox 10"/>
+          <p:cNvSpPr txBox="1"/>
+          <p:nvPr/>
+        </p:nvSpPr>
+        <p:spPr>
+          <a:xfrm>
+            <a:off x="6858000" y="6327648"/>
+            <a:ext cx="4572000" cy="320040"/>
+          </a:xfrm>
+          <a:prstGeom prst="rect">
+            <a:avLst/>
+          </a:prstGeom>
+          <a:noFill/>
+        </p:spPr>
+        <p:txBody>
+          <a:bodyPr wrap="none">
+            <a:spAutoFit/>
+          </a:bodyPr>
+          <a:lstStyle/>
+          <a:p>
+            <a:pPr algn="r">
+              <a:defRPr sz="950">
+                <a:solidFill>
+                  <a:srgbClr val="64748B"/>
+                </a:solidFill>
+              </a:defRPr>
+            </a:pPr>
+            <a:r>
+              <a:t>Dept. of CSE, VJCET</a:t>
             </a:r>
           </a:p>
         </p:txBody>
